--- a/data-eng/decks/w3d2s2.pptx
+++ b/data-eng/decks/w3d2s2.pptx
@@ -3100,7 +3100,7 @@
       <p:grpSpPr/>
       <p:sp>
         <p:nvSpPr>
-          <p:cNvPr id="2" name="Oval 1"/>
+          <p:cNvPr id="2" name="deckgen:decor"/>
           <p:cNvSpPr/>
           <p:nvPr/>
         </p:nvSpPr>
@@ -3130,7 +3130,7 @@
       </p:sp>
       <p:sp>
         <p:nvSpPr>
-          <p:cNvPr id="3" name="Oval 2"/>
+          <p:cNvPr id="3" name="deckgen:decor"/>
           <p:cNvSpPr/>
           <p:nvPr/>
         </p:nvSpPr>
@@ -3160,7 +3160,7 @@
       </p:sp>
       <p:sp>
         <p:nvSpPr>
-          <p:cNvPr id="4" name="Oval 3"/>
+          <p:cNvPr id="4" name="deckgen:decor"/>
           <p:cNvSpPr/>
           <p:nvPr/>
         </p:nvSpPr>
@@ -3190,7 +3190,7 @@
       </p:sp>
       <p:sp>
         <p:nvSpPr>
-          <p:cNvPr id="5" name="Rectangle 4"/>
+          <p:cNvPr id="5" name="deckgen:decor"/>
           <p:cNvSpPr/>
           <p:nvPr/>
         </p:nvSpPr>
@@ -3220,7 +3220,7 @@
       </p:sp>
       <p:sp>
         <p:nvSpPr>
-          <p:cNvPr id="6" name="Oval 5"/>
+          <p:cNvPr id="6" name="deckgen:decor"/>
           <p:cNvSpPr/>
           <p:nvPr/>
         </p:nvSpPr>
@@ -3250,7 +3250,7 @@
       </p:sp>
       <p:sp>
         <p:nvSpPr>
-          <p:cNvPr id="7" name="Oval 6"/>
+          <p:cNvPr id="7" name="deckgen:decor"/>
           <p:cNvSpPr/>
           <p:nvPr/>
         </p:nvSpPr>
@@ -3280,7 +3280,7 @@
       </p:sp>
       <p:sp>
         <p:nvSpPr>
-          <p:cNvPr id="8" name="Oval 7"/>
+          <p:cNvPr id="8" name="deckgen:decor"/>
           <p:cNvSpPr/>
           <p:nvPr/>
         </p:nvSpPr>
@@ -3310,7 +3310,7 @@
       </p:sp>
       <p:sp>
         <p:nvSpPr>
-          <p:cNvPr id="9" name="Oval 8"/>
+          <p:cNvPr id="9" name="deckgen:decor"/>
           <p:cNvSpPr/>
           <p:nvPr/>
         </p:nvSpPr>
@@ -3340,7 +3340,7 @@
       </p:sp>
       <p:sp>
         <p:nvSpPr>
-          <p:cNvPr id="10" name="Rectangle 9"/>
+          <p:cNvPr id="10" name="deckgen:decor"/>
           <p:cNvSpPr/>
           <p:nvPr/>
         </p:nvSpPr>
@@ -3600,7 +3600,7 @@
       <p:grpSpPr/>
       <p:sp>
         <p:nvSpPr>
-          <p:cNvPr id="2" name="Oval 1"/>
+          <p:cNvPr id="2" name="deckgen:decor"/>
           <p:cNvSpPr/>
           <p:nvPr/>
         </p:nvSpPr>
@@ -3630,7 +3630,7 @@
       </p:sp>
       <p:sp>
         <p:nvSpPr>
-          <p:cNvPr id="3" name="Oval 2"/>
+          <p:cNvPr id="3" name="deckgen:decor"/>
           <p:cNvSpPr/>
           <p:nvPr/>
         </p:nvSpPr>
@@ -3660,7 +3660,7 @@
       </p:sp>
       <p:sp>
         <p:nvSpPr>
-          <p:cNvPr id="4" name="Oval 3"/>
+          <p:cNvPr id="4" name="deckgen:decor"/>
           <p:cNvSpPr/>
           <p:nvPr/>
         </p:nvSpPr>
@@ -3941,7 +3941,7 @@
                 <a:ea typeface="Pretendard"/>
                 <a:cs typeface="Pretendard"/>
               </a:rPr>
-              <a:t>orders (1015, …) · customers (200, 3) · customers.csv 생성</a:t>
+              <a:t>orders (1015, 10) · customers (200, 3) · customers.csv 생성</a:t>
             </a:r>
           </a:p>
         </p:txBody>
@@ -4662,7 +4662,7 @@
       <p:grpSpPr/>
       <p:sp>
         <p:nvSpPr>
-          <p:cNvPr id="2" name="Oval 1"/>
+          <p:cNvPr id="2" name="deckgen:decor"/>
           <p:cNvSpPr/>
           <p:nvPr/>
         </p:nvSpPr>
@@ -4692,7 +4692,7 @@
       </p:sp>
       <p:sp>
         <p:nvSpPr>
-          <p:cNvPr id="3" name="Oval 2"/>
+          <p:cNvPr id="3" name="deckgen:decor"/>
           <p:cNvSpPr/>
           <p:nvPr/>
         </p:nvSpPr>
@@ -4868,7 +4868,7 @@
                 <a:ea typeface="Pretendard"/>
                 <a:cs typeface="Pretendard"/>
               </a:rPr>
-              <a:t>결합한 표 m 을 날짜 인덱스로 올려 일·주·월로 접고, orders_enriched.parquet 로 저장합니다</a:t>
+              <a:t>timeseries.py 에서 m 을 다시 만들어 날짜 인덱스로 올려 일·주·월로 접고, orders_enriched.parquet 로 저장합니다</a:t>
             </a:r>
           </a:p>
         </p:txBody>
@@ -5444,7 +5444,7 @@
                 <a:ea typeface="Pretendard"/>
                 <a:cs typeface="Pretendard"/>
               </a:rPr>
-              <a:t>결합된 m (1015행) 이 살아 있는 세션</a:t>
+              <a:t>customers.csv · analyze.py · (.venv) 터미널</a:t>
             </a:r>
           </a:p>
         </p:txBody>
@@ -5469,7 +5469,7 @@
       <p:grpSpPr/>
       <p:sp>
         <p:nvSpPr>
-          <p:cNvPr id="2" name="Oval 1"/>
+          <p:cNvPr id="2" name="deckgen:decor"/>
           <p:cNvSpPr/>
           <p:nvPr/>
         </p:nvSpPr>
@@ -5499,7 +5499,7 @@
       </p:sp>
       <p:sp>
         <p:nvSpPr>
-          <p:cNvPr id="3" name="Oval 2"/>
+          <p:cNvPr id="3" name="deckgen:decor"/>
           <p:cNvSpPr/>
           <p:nvPr/>
         </p:nvSpPr>
@@ -5529,7 +5529,7 @@
       </p:sp>
       <p:sp>
         <p:nvSpPr>
-          <p:cNvPr id="4" name="Oval 3"/>
+          <p:cNvPr id="4" name="deckgen:decor"/>
           <p:cNvSpPr/>
           <p:nvPr/>
         </p:nvSpPr>
@@ -6460,7 +6460,7 @@
       <p:grpSpPr/>
       <p:sp>
         <p:nvSpPr>
-          <p:cNvPr id="2" name="Oval 1"/>
+          <p:cNvPr id="2" name="deckgen:decor"/>
           <p:cNvSpPr/>
           <p:nvPr/>
         </p:nvSpPr>
@@ -6490,7 +6490,7 @@
       </p:sp>
       <p:sp>
         <p:nvSpPr>
-          <p:cNvPr id="3" name="Oval 2"/>
+          <p:cNvPr id="3" name="deckgen:decor"/>
           <p:cNvSpPr/>
           <p:nvPr/>
         </p:nvSpPr>
@@ -6520,7 +6520,7 @@
       </p:sp>
       <p:sp>
         <p:nvSpPr>
-          <p:cNvPr id="4" name="Oval 3"/>
+          <p:cNvPr id="4" name="deckgen:decor"/>
           <p:cNvSpPr/>
           <p:nvPr/>
         </p:nvSpPr>
@@ -6696,7 +6696,7 @@
                 <a:ea typeface="Pretendard"/>
                 <a:cs typeface="Pretendard"/>
               </a:rPr>
-              <a:t>3-1 에서 만든 orders_step1.parquet 가 있는 폴더에서 시작합니다</a:t>
+              <a:t>실습점검에서 켠 (.venv) 로 시작 — 1단계는 make_customers.py, 2~7단계는 analyze.py 한 파일에 이어 붙인다</a:t>
             </a:r>
           </a:p>
         </p:txBody>
@@ -7653,7 +7653,7 @@
       <p:grpSpPr/>
       <p:sp>
         <p:nvSpPr>
-          <p:cNvPr id="2" name="Oval 1"/>
+          <p:cNvPr id="2" name="deckgen:decor"/>
           <p:cNvSpPr/>
           <p:nvPr/>
         </p:nvSpPr>
@@ -7683,7 +7683,7 @@
       </p:sp>
       <p:sp>
         <p:nvSpPr>
-          <p:cNvPr id="3" name="Oval 2"/>
+          <p:cNvPr id="3" name="deckgen:decor"/>
           <p:cNvSpPr/>
           <p:nvPr/>
         </p:nvSpPr>
@@ -7713,7 +7713,7 @@
       </p:sp>
       <p:sp>
         <p:nvSpPr>
-          <p:cNvPr id="4" name="Oval 3"/>
+          <p:cNvPr id="4" name="deckgen:decor"/>
           <p:cNvSpPr/>
           <p:nvPr/>
         </p:nvSpPr>
@@ -8568,7 +8568,7 @@
                 <a:ea typeface="Pretendard"/>
                 <a:cs typeface="Pretendard"/>
               </a:rPr>
-              <a:t>orders (1015, …) / customers (200, 3)</a:t>
+              <a:t>orders (1015, 10) / customers (200, 3)</a:t>
             </a:r>
           </a:p>
         </p:txBody>
@@ -8609,7 +8609,7 @@
                 <a:ea typeface="Pretendard"/>
                 <a:cs typeface="Pretendard"/>
               </a:rPr>
-              <a:t>customers.csv 가 폴더에 생긴다 — orders 의 열 수는 3-1 에서 만든 파생 열 개수에 따라 다르다</a:t>
+              <a:t>customers.csv(4.2K) 가 폴더에 생긴다 — orders 는 3-1 끝 상태 그대로 (1015, 10)</a:t>
             </a:r>
           </a:p>
         </p:txBody>
@@ -8746,7 +8746,7 @@
       <p:grpSpPr/>
       <p:sp>
         <p:nvSpPr>
-          <p:cNvPr id="2" name="Oval 1"/>
+          <p:cNvPr id="2" name="deckgen:decor"/>
           <p:cNvSpPr/>
           <p:nvPr/>
         </p:nvSpPr>
@@ -8776,7 +8776,7 @@
       </p:sp>
       <p:sp>
         <p:nvSpPr>
-          <p:cNvPr id="3" name="Oval 2"/>
+          <p:cNvPr id="3" name="deckgen:decor"/>
           <p:cNvSpPr/>
           <p:nvPr/>
         </p:nvSpPr>
@@ -8806,7 +8806,7 @@
       </p:sp>
       <p:sp>
         <p:nvSpPr>
-          <p:cNvPr id="4" name="Oval 3"/>
+          <p:cNvPr id="4" name="deckgen:decor"/>
           <p:cNvSpPr/>
           <p:nvPr/>
         </p:nvSpPr>
@@ -9844,7 +9844,7 @@
       <p:grpSpPr/>
       <p:sp>
         <p:nvSpPr>
-          <p:cNvPr id="2" name="Oval 1"/>
+          <p:cNvPr id="2" name="deckgen:decor"/>
           <p:cNvSpPr/>
           <p:nvPr/>
         </p:nvSpPr>
@@ -9874,7 +9874,7 @@
       </p:sp>
       <p:sp>
         <p:nvSpPr>
-          <p:cNvPr id="3" name="Oval 2"/>
+          <p:cNvPr id="3" name="deckgen:decor"/>
           <p:cNvSpPr/>
           <p:nvPr/>
         </p:nvSpPr>
@@ -9904,7 +9904,7 @@
       </p:sp>
       <p:sp>
         <p:nvSpPr>
-          <p:cNvPr id="4" name="Oval 3"/>
+          <p:cNvPr id="4" name="deckgen:decor"/>
           <p:cNvSpPr/>
           <p:nvPr/>
         </p:nvSpPr>
@@ -10937,7 +10937,7 @@
       <p:grpSpPr/>
       <p:sp>
         <p:nvSpPr>
-          <p:cNvPr id="2" name="Oval 1"/>
+          <p:cNvPr id="2" name="deckgen:decor"/>
           <p:cNvSpPr/>
           <p:nvPr/>
         </p:nvSpPr>
@@ -10967,7 +10967,7 @@
       </p:sp>
       <p:sp>
         <p:nvSpPr>
-          <p:cNvPr id="3" name="Oval 2"/>
+          <p:cNvPr id="3" name="deckgen:decor"/>
           <p:cNvSpPr/>
           <p:nvPr/>
         </p:nvSpPr>
@@ -10997,7 +10997,7 @@
       </p:sp>
       <p:sp>
         <p:nvSpPr>
-          <p:cNvPr id="4" name="Oval 3"/>
+          <p:cNvPr id="4" name="deckgen:decor"/>
           <p:cNvSpPr/>
           <p:nvPr/>
         </p:nvSpPr>
@@ -11966,7 +11966,7 @@
       <p:grpSpPr/>
       <p:sp>
         <p:nvSpPr>
-          <p:cNvPr id="2" name="Oval 1"/>
+          <p:cNvPr id="2" name="deckgen:decor"/>
           <p:cNvSpPr/>
           <p:nvPr/>
         </p:nvSpPr>
@@ -11996,7 +11996,7 @@
       </p:sp>
       <p:sp>
         <p:nvSpPr>
-          <p:cNvPr id="3" name="Oval 2"/>
+          <p:cNvPr id="3" name="deckgen:decor"/>
           <p:cNvSpPr/>
           <p:nvPr/>
         </p:nvSpPr>
@@ -12026,7 +12026,7 @@
       </p:sp>
       <p:sp>
         <p:nvSpPr>
-          <p:cNvPr id="4" name="Oval 3"/>
+          <p:cNvPr id="4" name="deckgen:decor"/>
           <p:cNvSpPr/>
           <p:nvPr/>
         </p:nvSpPr>
@@ -13027,7 +13027,7 @@
       <p:grpSpPr/>
       <p:sp>
         <p:nvSpPr>
-          <p:cNvPr id="2" name="Oval 1"/>
+          <p:cNvPr id="2" name="deckgen:decor"/>
           <p:cNvSpPr/>
           <p:nvPr/>
         </p:nvSpPr>
@@ -13057,7 +13057,7 @@
       </p:sp>
       <p:sp>
         <p:nvSpPr>
-          <p:cNvPr id="3" name="Oval 2"/>
+          <p:cNvPr id="3" name="deckgen:decor"/>
           <p:cNvSpPr/>
           <p:nvPr/>
         </p:nvSpPr>
@@ -13087,7 +13087,7 @@
       </p:sp>
       <p:sp>
         <p:nvSpPr>
-          <p:cNvPr id="4" name="Oval 3"/>
+          <p:cNvPr id="4" name="deckgen:decor"/>
           <p:cNvSpPr/>
           <p:nvPr/>
         </p:nvSpPr>
